--- a/library/lectures/lec-04/rendered/lec-04-en.pptx
+++ b/library/lectures/lec-04/rendered/lec-04-en.pptx
@@ -7916,45 +7916,6 @@
           </a:p>
         </p:txBody>
       </p:sp>
-      <p:sp>
-        <p:nvSpPr>
-          <p:cNvPr id="14" name="TextBox 13"/>
-          <p:cNvSpPr txBox="1"/>
-          <p:nvPr/>
-        </p:nvSpPr>
-        <p:spPr>
-          <a:xfrm>
-            <a:off x="11274552" y="6547104"/>
-            <a:ext cx="868680" cy="256032"/>
-          </a:xfrm>
-          <a:prstGeom prst="rect">
-            <a:avLst/>
-          </a:prstGeom>
-          <a:noFill/>
-        </p:spPr>
-        <p:txBody>
-          <a:bodyPr wrap="none" lIns="0" rIns="0" tIns="0" bIns="0">
-            <a:spAutoFit/>
-          </a:bodyPr>
-          <a:lstStyle/>
-          <a:p>
-            <a:pPr algn="r">
-              <a:lnSpc>
-                <a:spcPct val="100000"/>
-              </a:lnSpc>
-            </a:pPr>
-            <a:r>
-              <a:rPr sz="1000" i="1">
-                <a:solidFill>
-                  <a:srgbClr val="5B6678"/>
-                </a:solidFill>
-                <a:latin typeface="DejaVu Sans"/>
-              </a:rPr>
-              <a:t>1 / 41</a:t>
-            </a:r>
-          </a:p>
-        </p:txBody>
-      </p:sp>
     </p:spTree>
   </p:cSld>
   <p:clrMapOvr>
@@ -9379,45 +9340,6 @@
           </a:p>
         </p:txBody>
       </p:sp>
-      <p:sp>
-        <p:nvSpPr>
-          <p:cNvPr id="33" name="TextBox 32"/>
-          <p:cNvSpPr txBox="1"/>
-          <p:nvPr/>
-        </p:nvSpPr>
-        <p:spPr>
-          <a:xfrm>
-            <a:off x="11274552" y="6547104"/>
-            <a:ext cx="868680" cy="256032"/>
-          </a:xfrm>
-          <a:prstGeom prst="rect">
-            <a:avLst/>
-          </a:prstGeom>
-          <a:noFill/>
-        </p:spPr>
-        <p:txBody>
-          <a:bodyPr wrap="none" lIns="0" rIns="0" tIns="0" bIns="0">
-            <a:spAutoFit/>
-          </a:bodyPr>
-          <a:lstStyle/>
-          <a:p>
-            <a:pPr algn="r">
-              <a:lnSpc>
-                <a:spcPct val="100000"/>
-              </a:lnSpc>
-            </a:pPr>
-            <a:r>
-              <a:rPr sz="1000" i="1">
-                <a:solidFill>
-                  <a:srgbClr val="5B6678"/>
-                </a:solidFill>
-                <a:latin typeface="DejaVu Sans"/>
-              </a:rPr>
-              <a:t>10 / 41</a:t>
-            </a:r>
-          </a:p>
-        </p:txBody>
-      </p:sp>
     </p:spTree>
   </p:cSld>
   <p:clrMapOvr>
@@ -10693,45 +10615,6 @@
           </a:p>
         </p:txBody>
       </p:sp>
-      <p:sp>
-        <p:nvSpPr>
-          <p:cNvPr id="28" name="TextBox 27"/>
-          <p:cNvSpPr txBox="1"/>
-          <p:nvPr/>
-        </p:nvSpPr>
-        <p:spPr>
-          <a:xfrm>
-            <a:off x="11274552" y="6547104"/>
-            <a:ext cx="868680" cy="256032"/>
-          </a:xfrm>
-          <a:prstGeom prst="rect">
-            <a:avLst/>
-          </a:prstGeom>
-          <a:noFill/>
-        </p:spPr>
-        <p:txBody>
-          <a:bodyPr wrap="none" lIns="0" rIns="0" tIns="0" bIns="0">
-            <a:spAutoFit/>
-          </a:bodyPr>
-          <a:lstStyle/>
-          <a:p>
-            <a:pPr algn="r">
-              <a:lnSpc>
-                <a:spcPct val="100000"/>
-              </a:lnSpc>
-            </a:pPr>
-            <a:r>
-              <a:rPr sz="1000" i="1">
-                <a:solidFill>
-                  <a:srgbClr val="5B6678"/>
-                </a:solidFill>
-                <a:latin typeface="DejaVu Sans"/>
-              </a:rPr>
-              <a:t>11 / 41</a:t>
-            </a:r>
-          </a:p>
-        </p:txBody>
-      </p:sp>
     </p:spTree>
   </p:cSld>
   <p:clrMapOvr>
@@ -11414,45 +11297,6 @@
           </a:p>
         </p:txBody>
       </p:sp>
-      <p:sp>
-        <p:nvSpPr>
-          <p:cNvPr id="15" name="TextBox 14"/>
-          <p:cNvSpPr txBox="1"/>
-          <p:nvPr/>
-        </p:nvSpPr>
-        <p:spPr>
-          <a:xfrm>
-            <a:off x="11274552" y="6547104"/>
-            <a:ext cx="868680" cy="256032"/>
-          </a:xfrm>
-          <a:prstGeom prst="rect">
-            <a:avLst/>
-          </a:prstGeom>
-          <a:noFill/>
-        </p:spPr>
-        <p:txBody>
-          <a:bodyPr wrap="none" lIns="0" rIns="0" tIns="0" bIns="0">
-            <a:spAutoFit/>
-          </a:bodyPr>
-          <a:lstStyle/>
-          <a:p>
-            <a:pPr algn="r">
-              <a:lnSpc>
-                <a:spcPct val="100000"/>
-              </a:lnSpc>
-            </a:pPr>
-            <a:r>
-              <a:rPr sz="1000" i="1">
-                <a:solidFill>
-                  <a:srgbClr val="5B6678"/>
-                </a:solidFill>
-                <a:latin typeface="DejaVu Sans"/>
-              </a:rPr>
-              <a:t>12 / 41</a:t>
-            </a:r>
-          </a:p>
-        </p:txBody>
-      </p:sp>
     </p:spTree>
   </p:cSld>
   <p:clrMapOvr>
@@ -12687,45 +12531,6 @@
           </a:p>
         </p:txBody>
       </p:sp>
-      <p:sp>
-        <p:nvSpPr>
-          <p:cNvPr id="31" name="TextBox 30"/>
-          <p:cNvSpPr txBox="1"/>
-          <p:nvPr/>
-        </p:nvSpPr>
-        <p:spPr>
-          <a:xfrm>
-            <a:off x="11274552" y="6547104"/>
-            <a:ext cx="868680" cy="256032"/>
-          </a:xfrm>
-          <a:prstGeom prst="rect">
-            <a:avLst/>
-          </a:prstGeom>
-          <a:noFill/>
-        </p:spPr>
-        <p:txBody>
-          <a:bodyPr wrap="none" lIns="0" rIns="0" tIns="0" bIns="0">
-            <a:spAutoFit/>
-          </a:bodyPr>
-          <a:lstStyle/>
-          <a:p>
-            <a:pPr algn="r">
-              <a:lnSpc>
-                <a:spcPct val="100000"/>
-              </a:lnSpc>
-            </a:pPr>
-            <a:r>
-              <a:rPr sz="1000" i="1">
-                <a:solidFill>
-                  <a:srgbClr val="5B6678"/>
-                </a:solidFill>
-                <a:latin typeface="DejaVu Sans"/>
-              </a:rPr>
-              <a:t>13 / 41</a:t>
-            </a:r>
-          </a:p>
-        </p:txBody>
-      </p:sp>
     </p:spTree>
   </p:cSld>
   <p:clrMapOvr>
@@ -13908,45 +13713,6 @@
           </a:p>
         </p:txBody>
       </p:sp>
-      <p:sp>
-        <p:nvSpPr>
-          <p:cNvPr id="26" name="TextBox 25"/>
-          <p:cNvSpPr txBox="1"/>
-          <p:nvPr/>
-        </p:nvSpPr>
-        <p:spPr>
-          <a:xfrm>
-            <a:off x="11274552" y="6547104"/>
-            <a:ext cx="868680" cy="256032"/>
-          </a:xfrm>
-          <a:prstGeom prst="rect">
-            <a:avLst/>
-          </a:prstGeom>
-          <a:noFill/>
-        </p:spPr>
-        <p:txBody>
-          <a:bodyPr wrap="none" lIns="0" rIns="0" tIns="0" bIns="0">
-            <a:spAutoFit/>
-          </a:bodyPr>
-          <a:lstStyle/>
-          <a:p>
-            <a:pPr algn="r">
-              <a:lnSpc>
-                <a:spcPct val="100000"/>
-              </a:lnSpc>
-            </a:pPr>
-            <a:r>
-              <a:rPr sz="1000" i="1">
-                <a:solidFill>
-                  <a:srgbClr val="5B6678"/>
-                </a:solidFill>
-                <a:latin typeface="DejaVu Sans"/>
-              </a:rPr>
-              <a:t>14 / 41</a:t>
-            </a:r>
-          </a:p>
-        </p:txBody>
-      </p:sp>
     </p:spTree>
   </p:cSld>
   <p:clrMapOvr>
@@ -16293,45 +16059,6 @@
           </a:p>
         </p:txBody>
       </p:sp>
-      <p:sp>
-        <p:nvSpPr>
-          <p:cNvPr id="54" name="TextBox 53"/>
-          <p:cNvSpPr txBox="1"/>
-          <p:nvPr/>
-        </p:nvSpPr>
-        <p:spPr>
-          <a:xfrm>
-            <a:off x="11274552" y="6547104"/>
-            <a:ext cx="868680" cy="256032"/>
-          </a:xfrm>
-          <a:prstGeom prst="rect">
-            <a:avLst/>
-          </a:prstGeom>
-          <a:noFill/>
-        </p:spPr>
-        <p:txBody>
-          <a:bodyPr wrap="none" lIns="0" rIns="0" tIns="0" bIns="0">
-            <a:spAutoFit/>
-          </a:bodyPr>
-          <a:lstStyle/>
-          <a:p>
-            <a:pPr algn="r">
-              <a:lnSpc>
-                <a:spcPct val="100000"/>
-              </a:lnSpc>
-            </a:pPr>
-            <a:r>
-              <a:rPr sz="1000" i="1">
-                <a:solidFill>
-                  <a:srgbClr val="5B6678"/>
-                </a:solidFill>
-                <a:latin typeface="DejaVu Sans"/>
-              </a:rPr>
-              <a:t>15 / 41</a:t>
-            </a:r>
-          </a:p>
-        </p:txBody>
-      </p:sp>
     </p:spTree>
   </p:cSld>
   <p:clrMapOvr>
@@ -17794,45 +17521,6 @@
           </a:p>
         </p:txBody>
       </p:sp>
-      <p:sp>
-        <p:nvSpPr>
-          <p:cNvPr id="35" name="TextBox 34"/>
-          <p:cNvSpPr txBox="1"/>
-          <p:nvPr/>
-        </p:nvSpPr>
-        <p:spPr>
-          <a:xfrm>
-            <a:off x="11274552" y="6547104"/>
-            <a:ext cx="868680" cy="256032"/>
-          </a:xfrm>
-          <a:prstGeom prst="rect">
-            <a:avLst/>
-          </a:prstGeom>
-          <a:noFill/>
-        </p:spPr>
-        <p:txBody>
-          <a:bodyPr wrap="none" lIns="0" rIns="0" tIns="0" bIns="0">
-            <a:spAutoFit/>
-          </a:bodyPr>
-          <a:lstStyle/>
-          <a:p>
-            <a:pPr algn="r">
-              <a:lnSpc>
-                <a:spcPct val="100000"/>
-              </a:lnSpc>
-            </a:pPr>
-            <a:r>
-              <a:rPr sz="1000" i="1">
-                <a:solidFill>
-                  <a:srgbClr val="5B6678"/>
-                </a:solidFill>
-                <a:latin typeface="DejaVu Sans"/>
-              </a:rPr>
-              <a:t>16 / 41</a:t>
-            </a:r>
-          </a:p>
-        </p:txBody>
-      </p:sp>
     </p:spTree>
   </p:cSld>
   <p:clrMapOvr>
@@ -19067,45 +18755,6 @@
           </a:p>
         </p:txBody>
       </p:sp>
-      <p:sp>
-        <p:nvSpPr>
-          <p:cNvPr id="31" name="TextBox 30"/>
-          <p:cNvSpPr txBox="1"/>
-          <p:nvPr/>
-        </p:nvSpPr>
-        <p:spPr>
-          <a:xfrm>
-            <a:off x="11274552" y="6547104"/>
-            <a:ext cx="868680" cy="256032"/>
-          </a:xfrm>
-          <a:prstGeom prst="rect">
-            <a:avLst/>
-          </a:prstGeom>
-          <a:noFill/>
-        </p:spPr>
-        <p:txBody>
-          <a:bodyPr wrap="none" lIns="0" rIns="0" tIns="0" bIns="0">
-            <a:spAutoFit/>
-          </a:bodyPr>
-          <a:lstStyle/>
-          <a:p>
-            <a:pPr algn="r">
-              <a:lnSpc>
-                <a:spcPct val="100000"/>
-              </a:lnSpc>
-            </a:pPr>
-            <a:r>
-              <a:rPr sz="1000" i="1">
-                <a:solidFill>
-                  <a:srgbClr val="5B6678"/>
-                </a:solidFill>
-                <a:latin typeface="DejaVu Sans"/>
-              </a:rPr>
-              <a:t>17 / 41</a:t>
-            </a:r>
-          </a:p>
-        </p:txBody>
-      </p:sp>
     </p:spTree>
   </p:cSld>
   <p:clrMapOvr>
@@ -20529,45 +20178,6 @@
           </a:p>
         </p:txBody>
       </p:sp>
-      <p:sp>
-        <p:nvSpPr>
-          <p:cNvPr id="34" name="TextBox 33"/>
-          <p:cNvSpPr txBox="1"/>
-          <p:nvPr/>
-        </p:nvSpPr>
-        <p:spPr>
-          <a:xfrm>
-            <a:off x="11274552" y="6547104"/>
-            <a:ext cx="868680" cy="256032"/>
-          </a:xfrm>
-          <a:prstGeom prst="rect">
-            <a:avLst/>
-          </a:prstGeom>
-          <a:noFill/>
-        </p:spPr>
-        <p:txBody>
-          <a:bodyPr wrap="none" lIns="0" rIns="0" tIns="0" bIns="0">
-            <a:spAutoFit/>
-          </a:bodyPr>
-          <a:lstStyle/>
-          <a:p>
-            <a:pPr algn="r">
-              <a:lnSpc>
-                <a:spcPct val="100000"/>
-              </a:lnSpc>
-            </a:pPr>
-            <a:r>
-              <a:rPr sz="1000" i="1">
-                <a:solidFill>
-                  <a:srgbClr val="5B6678"/>
-                </a:solidFill>
-                <a:latin typeface="DejaVu Sans"/>
-              </a:rPr>
-              <a:t>18 / 41</a:t>
-            </a:r>
-          </a:p>
-        </p:txBody>
-      </p:sp>
     </p:spTree>
   </p:cSld>
   <p:clrMapOvr>
@@ -21854,45 +21464,6 @@
           </a:p>
         </p:txBody>
       </p:sp>
-      <p:sp>
-        <p:nvSpPr>
-          <p:cNvPr id="30" name="TextBox 29"/>
-          <p:cNvSpPr txBox="1"/>
-          <p:nvPr/>
-        </p:nvSpPr>
-        <p:spPr>
-          <a:xfrm>
-            <a:off x="11274552" y="6547104"/>
-            <a:ext cx="868680" cy="256032"/>
-          </a:xfrm>
-          <a:prstGeom prst="rect">
-            <a:avLst/>
-          </a:prstGeom>
-          <a:noFill/>
-        </p:spPr>
-        <p:txBody>
-          <a:bodyPr wrap="none" lIns="0" rIns="0" tIns="0" bIns="0">
-            <a:spAutoFit/>
-          </a:bodyPr>
-          <a:lstStyle/>
-          <a:p>
-            <a:pPr algn="r">
-              <a:lnSpc>
-                <a:spcPct val="100000"/>
-              </a:lnSpc>
-            </a:pPr>
-            <a:r>
-              <a:rPr sz="1000" i="1">
-                <a:solidFill>
-                  <a:srgbClr val="5B6678"/>
-                </a:solidFill>
-                <a:latin typeface="DejaVu Sans"/>
-              </a:rPr>
-              <a:t>19 / 41</a:t>
-            </a:r>
-          </a:p>
-        </p:txBody>
-      </p:sp>
     </p:spTree>
   </p:cSld>
   <p:clrMapOvr>
@@ -23601,45 +23172,6 @@
           </a:p>
         </p:txBody>
       </p:sp>
-      <p:sp>
-        <p:nvSpPr>
-          <p:cNvPr id="41" name="TextBox 40"/>
-          <p:cNvSpPr txBox="1"/>
-          <p:nvPr/>
-        </p:nvSpPr>
-        <p:spPr>
-          <a:xfrm>
-            <a:off x="11274552" y="6547104"/>
-            <a:ext cx="868680" cy="256032"/>
-          </a:xfrm>
-          <a:prstGeom prst="rect">
-            <a:avLst/>
-          </a:prstGeom>
-          <a:noFill/>
-        </p:spPr>
-        <p:txBody>
-          <a:bodyPr wrap="none" lIns="0" rIns="0" tIns="0" bIns="0">
-            <a:spAutoFit/>
-          </a:bodyPr>
-          <a:lstStyle/>
-          <a:p>
-            <a:pPr algn="r">
-              <a:lnSpc>
-                <a:spcPct val="100000"/>
-              </a:lnSpc>
-            </a:pPr>
-            <a:r>
-              <a:rPr sz="1000" i="1">
-                <a:solidFill>
-                  <a:srgbClr val="5B6678"/>
-                </a:solidFill>
-                <a:latin typeface="DejaVu Sans"/>
-              </a:rPr>
-              <a:t>2 / 41</a:t>
-            </a:r>
-          </a:p>
-        </p:txBody>
-      </p:sp>
     </p:spTree>
   </p:cSld>
   <p:clrMapOvr>
@@ -24872,45 +24404,6 @@
           </a:p>
         </p:txBody>
       </p:sp>
-      <p:sp>
-        <p:nvSpPr>
-          <p:cNvPr id="25" name="TextBox 24"/>
-          <p:cNvSpPr txBox="1"/>
-          <p:nvPr/>
-        </p:nvSpPr>
-        <p:spPr>
-          <a:xfrm>
-            <a:off x="11274552" y="6547104"/>
-            <a:ext cx="868680" cy="256032"/>
-          </a:xfrm>
-          <a:prstGeom prst="rect">
-            <a:avLst/>
-          </a:prstGeom>
-          <a:noFill/>
-        </p:spPr>
-        <p:txBody>
-          <a:bodyPr wrap="none" lIns="0" rIns="0" tIns="0" bIns="0">
-            <a:spAutoFit/>
-          </a:bodyPr>
-          <a:lstStyle/>
-          <a:p>
-            <a:pPr algn="r">
-              <a:lnSpc>
-                <a:spcPct val="100000"/>
-              </a:lnSpc>
-            </a:pPr>
-            <a:r>
-              <a:rPr sz="1000" i="1">
-                <a:solidFill>
-                  <a:srgbClr val="5B6678"/>
-                </a:solidFill>
-                <a:latin typeface="DejaVu Sans"/>
-              </a:rPr>
-              <a:t>20 / 41</a:t>
-            </a:r>
-          </a:p>
-        </p:txBody>
-      </p:sp>
     </p:spTree>
   </p:cSld>
   <p:clrMapOvr>
@@ -25884,45 +25377,6 @@
           </a:p>
         </p:txBody>
       </p:sp>
-      <p:sp>
-        <p:nvSpPr>
-          <p:cNvPr id="23" name="TextBox 22"/>
-          <p:cNvSpPr txBox="1"/>
-          <p:nvPr/>
-        </p:nvSpPr>
-        <p:spPr>
-          <a:xfrm>
-            <a:off x="11274552" y="6547104"/>
-            <a:ext cx="868680" cy="256032"/>
-          </a:xfrm>
-          <a:prstGeom prst="rect">
-            <a:avLst/>
-          </a:prstGeom>
-          <a:noFill/>
-        </p:spPr>
-        <p:txBody>
-          <a:bodyPr wrap="none" lIns="0" rIns="0" tIns="0" bIns="0">
-            <a:spAutoFit/>
-          </a:bodyPr>
-          <a:lstStyle/>
-          <a:p>
-            <a:pPr algn="r">
-              <a:lnSpc>
-                <a:spcPct val="100000"/>
-              </a:lnSpc>
-            </a:pPr>
-            <a:r>
-              <a:rPr sz="1000" i="1">
-                <a:solidFill>
-                  <a:srgbClr val="5B6678"/>
-                </a:solidFill>
-                <a:latin typeface="DejaVu Sans"/>
-              </a:rPr>
-              <a:t>21 / 41</a:t>
-            </a:r>
-          </a:p>
-        </p:txBody>
-      </p:sp>
     </p:spTree>
   </p:cSld>
   <p:clrMapOvr>
@@ -26789,45 +26243,6 @@
           </a:p>
         </p:txBody>
       </p:sp>
-      <p:sp>
-        <p:nvSpPr>
-          <p:cNvPr id="21" name="TextBox 20"/>
-          <p:cNvSpPr txBox="1"/>
-          <p:nvPr/>
-        </p:nvSpPr>
-        <p:spPr>
-          <a:xfrm>
-            <a:off x="11274552" y="6547104"/>
-            <a:ext cx="868680" cy="256032"/>
-          </a:xfrm>
-          <a:prstGeom prst="rect">
-            <a:avLst/>
-          </a:prstGeom>
-          <a:noFill/>
-        </p:spPr>
-        <p:txBody>
-          <a:bodyPr wrap="none" lIns="0" rIns="0" tIns="0" bIns="0">
-            <a:spAutoFit/>
-          </a:bodyPr>
-          <a:lstStyle/>
-          <a:p>
-            <a:pPr algn="r">
-              <a:lnSpc>
-                <a:spcPct val="100000"/>
-              </a:lnSpc>
-            </a:pPr>
-            <a:r>
-              <a:rPr sz="1000" i="1">
-                <a:solidFill>
-                  <a:srgbClr val="5B6678"/>
-                </a:solidFill>
-                <a:latin typeface="DejaVu Sans"/>
-              </a:rPr>
-              <a:t>22 / 41</a:t>
-            </a:r>
-          </a:p>
-        </p:txBody>
-      </p:sp>
     </p:spTree>
   </p:cSld>
   <p:clrMapOvr>
@@ -28062,45 +27477,6 @@
           </a:p>
         </p:txBody>
       </p:sp>
-      <p:sp>
-        <p:nvSpPr>
-          <p:cNvPr id="31" name="TextBox 30"/>
-          <p:cNvSpPr txBox="1"/>
-          <p:nvPr/>
-        </p:nvSpPr>
-        <p:spPr>
-          <a:xfrm>
-            <a:off x="11274552" y="6547104"/>
-            <a:ext cx="868680" cy="256032"/>
-          </a:xfrm>
-          <a:prstGeom prst="rect">
-            <a:avLst/>
-          </a:prstGeom>
-          <a:noFill/>
-        </p:spPr>
-        <p:txBody>
-          <a:bodyPr wrap="none" lIns="0" rIns="0" tIns="0" bIns="0">
-            <a:spAutoFit/>
-          </a:bodyPr>
-          <a:lstStyle/>
-          <a:p>
-            <a:pPr algn="r">
-              <a:lnSpc>
-                <a:spcPct val="100000"/>
-              </a:lnSpc>
-            </a:pPr>
-            <a:r>
-              <a:rPr sz="1000" i="1">
-                <a:solidFill>
-                  <a:srgbClr val="5B6678"/>
-                </a:solidFill>
-                <a:latin typeface="DejaVu Sans"/>
-              </a:rPr>
-              <a:t>23 / 41</a:t>
-            </a:r>
-          </a:p>
-        </p:txBody>
-      </p:sp>
     </p:spTree>
   </p:cSld>
   <p:clrMapOvr>
@@ -29521,45 +28897,6 @@
           </a:p>
         </p:txBody>
       </p:sp>
-      <p:sp>
-        <p:nvSpPr>
-          <p:cNvPr id="31" name="TextBox 30"/>
-          <p:cNvSpPr txBox="1"/>
-          <p:nvPr/>
-        </p:nvSpPr>
-        <p:spPr>
-          <a:xfrm>
-            <a:off x="11274552" y="6547104"/>
-            <a:ext cx="868680" cy="256032"/>
-          </a:xfrm>
-          <a:prstGeom prst="rect">
-            <a:avLst/>
-          </a:prstGeom>
-          <a:noFill/>
-        </p:spPr>
-        <p:txBody>
-          <a:bodyPr wrap="none" lIns="0" rIns="0" tIns="0" bIns="0">
-            <a:spAutoFit/>
-          </a:bodyPr>
-          <a:lstStyle/>
-          <a:p>
-            <a:pPr algn="r">
-              <a:lnSpc>
-                <a:spcPct val="100000"/>
-              </a:lnSpc>
-            </a:pPr>
-            <a:r>
-              <a:rPr sz="1000" i="1">
-                <a:solidFill>
-                  <a:srgbClr val="5B6678"/>
-                </a:solidFill>
-                <a:latin typeface="DejaVu Sans"/>
-              </a:rPr>
-              <a:t>24 / 41</a:t>
-            </a:r>
-          </a:p>
-        </p:txBody>
-      </p:sp>
     </p:spTree>
   </p:cSld>
   <p:clrMapOvr>
@@ -30209,45 +29546,6 @@
           </a:p>
         </p:txBody>
       </p:sp>
-      <p:sp>
-        <p:nvSpPr>
-          <p:cNvPr id="16" name="TextBox 15"/>
-          <p:cNvSpPr txBox="1"/>
-          <p:nvPr/>
-        </p:nvSpPr>
-        <p:spPr>
-          <a:xfrm>
-            <a:off x="11274552" y="6547104"/>
-            <a:ext cx="868680" cy="256032"/>
-          </a:xfrm>
-          <a:prstGeom prst="rect">
-            <a:avLst/>
-          </a:prstGeom>
-          <a:noFill/>
-        </p:spPr>
-        <p:txBody>
-          <a:bodyPr wrap="none" lIns="0" rIns="0" tIns="0" bIns="0">
-            <a:spAutoFit/>
-          </a:bodyPr>
-          <a:lstStyle/>
-          <a:p>
-            <a:pPr algn="r">
-              <a:lnSpc>
-                <a:spcPct val="100000"/>
-              </a:lnSpc>
-            </a:pPr>
-            <a:r>
-              <a:rPr sz="1000" i="1">
-                <a:solidFill>
-                  <a:srgbClr val="5B6678"/>
-                </a:solidFill>
-                <a:latin typeface="DejaVu Sans"/>
-              </a:rPr>
-              <a:t>25 / 41</a:t>
-            </a:r>
-          </a:p>
-        </p:txBody>
-      </p:sp>
     </p:spTree>
   </p:cSld>
   <p:clrMapOvr>
@@ -31482,45 +30780,6 @@
           </a:p>
         </p:txBody>
       </p:sp>
-      <p:sp>
-        <p:nvSpPr>
-          <p:cNvPr id="31" name="TextBox 30"/>
-          <p:cNvSpPr txBox="1"/>
-          <p:nvPr/>
-        </p:nvSpPr>
-        <p:spPr>
-          <a:xfrm>
-            <a:off x="11274552" y="6547104"/>
-            <a:ext cx="868680" cy="256032"/>
-          </a:xfrm>
-          <a:prstGeom prst="rect">
-            <a:avLst/>
-          </a:prstGeom>
-          <a:noFill/>
-        </p:spPr>
-        <p:txBody>
-          <a:bodyPr wrap="none" lIns="0" rIns="0" tIns="0" bIns="0">
-            <a:spAutoFit/>
-          </a:bodyPr>
-          <a:lstStyle/>
-          <a:p>
-            <a:pPr algn="r">
-              <a:lnSpc>
-                <a:spcPct val="100000"/>
-              </a:lnSpc>
-            </a:pPr>
-            <a:r>
-              <a:rPr sz="1000" i="1">
-                <a:solidFill>
-                  <a:srgbClr val="5B6678"/>
-                </a:solidFill>
-                <a:latin typeface="DejaVu Sans"/>
-              </a:rPr>
-              <a:t>26 / 41</a:t>
-            </a:r>
-          </a:p>
-        </p:txBody>
-      </p:sp>
     </p:spTree>
   </p:cSld>
   <p:clrMapOvr>
@@ -32457,45 +31716,6 @@
           </a:p>
         </p:txBody>
       </p:sp>
-      <p:sp>
-        <p:nvSpPr>
-          <p:cNvPr id="22" name="TextBox 21"/>
-          <p:cNvSpPr txBox="1"/>
-          <p:nvPr/>
-        </p:nvSpPr>
-        <p:spPr>
-          <a:xfrm>
-            <a:off x="11274552" y="6547104"/>
-            <a:ext cx="868680" cy="256032"/>
-          </a:xfrm>
-          <a:prstGeom prst="rect">
-            <a:avLst/>
-          </a:prstGeom>
-          <a:noFill/>
-        </p:spPr>
-        <p:txBody>
-          <a:bodyPr wrap="none" lIns="0" rIns="0" tIns="0" bIns="0">
-            <a:spAutoFit/>
-          </a:bodyPr>
-          <a:lstStyle/>
-          <a:p>
-            <a:pPr algn="r">
-              <a:lnSpc>
-                <a:spcPct val="100000"/>
-              </a:lnSpc>
-            </a:pPr>
-            <a:r>
-              <a:rPr sz="1000" i="1">
-                <a:solidFill>
-                  <a:srgbClr val="5B6678"/>
-                </a:solidFill>
-                <a:latin typeface="DejaVu Sans"/>
-              </a:rPr>
-              <a:t>27 / 41</a:t>
-            </a:r>
-          </a:p>
-        </p:txBody>
-      </p:sp>
     </p:spTree>
   </p:cSld>
   <p:clrMapOvr>
@@ -33358,45 +32578,6 @@
           </a:p>
         </p:txBody>
       </p:sp>
-      <p:sp>
-        <p:nvSpPr>
-          <p:cNvPr id="20" name="TextBox 19"/>
-          <p:cNvSpPr txBox="1"/>
-          <p:nvPr/>
-        </p:nvSpPr>
-        <p:spPr>
-          <a:xfrm>
-            <a:off x="11274552" y="6547104"/>
-            <a:ext cx="868680" cy="256032"/>
-          </a:xfrm>
-          <a:prstGeom prst="rect">
-            <a:avLst/>
-          </a:prstGeom>
-          <a:noFill/>
-        </p:spPr>
-        <p:txBody>
-          <a:bodyPr wrap="none" lIns="0" rIns="0" tIns="0" bIns="0">
-            <a:spAutoFit/>
-          </a:bodyPr>
-          <a:lstStyle/>
-          <a:p>
-            <a:pPr algn="r">
-              <a:lnSpc>
-                <a:spcPct val="100000"/>
-              </a:lnSpc>
-            </a:pPr>
-            <a:r>
-              <a:rPr sz="1000" i="1">
-                <a:solidFill>
-                  <a:srgbClr val="5B6678"/>
-                </a:solidFill>
-                <a:latin typeface="DejaVu Sans"/>
-              </a:rPr>
-              <a:t>28 / 41</a:t>
-            </a:r>
-          </a:p>
-        </p:txBody>
-      </p:sp>
     </p:spTree>
   </p:cSld>
   <p:clrMapOvr>
@@ -34816,45 +33997,6 @@
           </a:p>
         </p:txBody>
       </p:sp>
-      <p:sp>
-        <p:nvSpPr>
-          <p:cNvPr id="32" name="TextBox 31"/>
-          <p:cNvSpPr txBox="1"/>
-          <p:nvPr/>
-        </p:nvSpPr>
-        <p:spPr>
-          <a:xfrm>
-            <a:off x="11274552" y="6547104"/>
-            <a:ext cx="868680" cy="256032"/>
-          </a:xfrm>
-          <a:prstGeom prst="rect">
-            <a:avLst/>
-          </a:prstGeom>
-          <a:noFill/>
-        </p:spPr>
-        <p:txBody>
-          <a:bodyPr wrap="none" lIns="0" rIns="0" tIns="0" bIns="0">
-            <a:spAutoFit/>
-          </a:bodyPr>
-          <a:lstStyle/>
-          <a:p>
-            <a:pPr algn="r">
-              <a:lnSpc>
-                <a:spcPct val="100000"/>
-              </a:lnSpc>
-            </a:pPr>
-            <a:r>
-              <a:rPr sz="1000" i="1">
-                <a:solidFill>
-                  <a:srgbClr val="5B6678"/>
-                </a:solidFill>
-                <a:latin typeface="DejaVu Sans"/>
-              </a:rPr>
-              <a:t>29 / 41</a:t>
-            </a:r>
-          </a:p>
-        </p:txBody>
-      </p:sp>
     </p:spTree>
   </p:cSld>
   <p:clrMapOvr>
@@ -35607,45 +34749,6 @@
           </a:p>
         </p:txBody>
       </p:sp>
-      <p:sp>
-        <p:nvSpPr>
-          <p:cNvPr id="21" name="TextBox 20"/>
-          <p:cNvSpPr txBox="1"/>
-          <p:nvPr/>
-        </p:nvSpPr>
-        <p:spPr>
-          <a:xfrm>
-            <a:off x="11274552" y="6547104"/>
-            <a:ext cx="868680" cy="256032"/>
-          </a:xfrm>
-          <a:prstGeom prst="rect">
-            <a:avLst/>
-          </a:prstGeom>
-          <a:noFill/>
-        </p:spPr>
-        <p:txBody>
-          <a:bodyPr wrap="none" lIns="0" rIns="0" tIns="0" bIns="0">
-            <a:spAutoFit/>
-          </a:bodyPr>
-          <a:lstStyle/>
-          <a:p>
-            <a:pPr algn="r">
-              <a:lnSpc>
-                <a:spcPct val="100000"/>
-              </a:lnSpc>
-            </a:pPr>
-            <a:r>
-              <a:rPr sz="1000" i="1">
-                <a:solidFill>
-                  <a:srgbClr val="5B6678"/>
-                </a:solidFill>
-                <a:latin typeface="DejaVu Sans"/>
-              </a:rPr>
-              <a:t>3 / 41</a:t>
-            </a:r>
-          </a:p>
-        </p:txBody>
-      </p:sp>
     </p:spTree>
   </p:cSld>
   <p:clrMapOvr>
@@ -36429,45 +35532,6 @@
           </a:p>
         </p:txBody>
       </p:sp>
-      <p:sp>
-        <p:nvSpPr>
-          <p:cNvPr id="19" name="TextBox 18"/>
-          <p:cNvSpPr txBox="1"/>
-          <p:nvPr/>
-        </p:nvSpPr>
-        <p:spPr>
-          <a:xfrm>
-            <a:off x="11274552" y="6547104"/>
-            <a:ext cx="868680" cy="256032"/>
-          </a:xfrm>
-          <a:prstGeom prst="rect">
-            <a:avLst/>
-          </a:prstGeom>
-          <a:noFill/>
-        </p:spPr>
-        <p:txBody>
-          <a:bodyPr wrap="none" lIns="0" rIns="0" tIns="0" bIns="0">
-            <a:spAutoFit/>
-          </a:bodyPr>
-          <a:lstStyle/>
-          <a:p>
-            <a:pPr algn="r">
-              <a:lnSpc>
-                <a:spcPct val="100000"/>
-              </a:lnSpc>
-            </a:pPr>
-            <a:r>
-              <a:rPr sz="1000" i="1">
-                <a:solidFill>
-                  <a:srgbClr val="5B6678"/>
-                </a:solidFill>
-                <a:latin typeface="DejaVu Sans"/>
-              </a:rPr>
-              <a:t>30 / 41</a:t>
-            </a:r>
-          </a:p>
-        </p:txBody>
-      </p:sp>
     </p:spTree>
   </p:cSld>
   <p:clrMapOvr>
@@ -37550,45 +36614,6 @@
           </a:p>
         </p:txBody>
       </p:sp>
-      <p:sp>
-        <p:nvSpPr>
-          <p:cNvPr id="26" name="TextBox 25"/>
-          <p:cNvSpPr txBox="1"/>
-          <p:nvPr/>
-        </p:nvSpPr>
-        <p:spPr>
-          <a:xfrm>
-            <a:off x="11274552" y="6547104"/>
-            <a:ext cx="868680" cy="256032"/>
-          </a:xfrm>
-          <a:prstGeom prst="rect">
-            <a:avLst/>
-          </a:prstGeom>
-          <a:noFill/>
-        </p:spPr>
-        <p:txBody>
-          <a:bodyPr wrap="none" lIns="0" rIns="0" tIns="0" bIns="0">
-            <a:spAutoFit/>
-          </a:bodyPr>
-          <a:lstStyle/>
-          <a:p>
-            <a:pPr algn="r">
-              <a:lnSpc>
-                <a:spcPct val="100000"/>
-              </a:lnSpc>
-            </a:pPr>
-            <a:r>
-              <a:rPr sz="1000" i="1">
-                <a:solidFill>
-                  <a:srgbClr val="5B6678"/>
-                </a:solidFill>
-                <a:latin typeface="DejaVu Sans"/>
-              </a:rPr>
-              <a:t>31 / 41</a:t>
-            </a:r>
-          </a:p>
-        </p:txBody>
-      </p:sp>
     </p:spTree>
   </p:cSld>
   <p:clrMapOvr>
@@ -38866,45 +37891,6 @@
           </a:p>
         </p:txBody>
       </p:sp>
-      <p:sp>
-        <p:nvSpPr>
-          <p:cNvPr id="31" name="TextBox 30"/>
-          <p:cNvSpPr txBox="1"/>
-          <p:nvPr/>
-        </p:nvSpPr>
-        <p:spPr>
-          <a:xfrm>
-            <a:off x="11274552" y="6547104"/>
-            <a:ext cx="868680" cy="256032"/>
-          </a:xfrm>
-          <a:prstGeom prst="rect">
-            <a:avLst/>
-          </a:prstGeom>
-          <a:noFill/>
-        </p:spPr>
-        <p:txBody>
-          <a:bodyPr wrap="none" lIns="0" rIns="0" tIns="0" bIns="0">
-            <a:spAutoFit/>
-          </a:bodyPr>
-          <a:lstStyle/>
-          <a:p>
-            <a:pPr algn="r">
-              <a:lnSpc>
-                <a:spcPct val="100000"/>
-              </a:lnSpc>
-            </a:pPr>
-            <a:r>
-              <a:rPr sz="1000" i="1">
-                <a:solidFill>
-                  <a:srgbClr val="5B6678"/>
-                </a:solidFill>
-                <a:latin typeface="DejaVu Sans"/>
-              </a:rPr>
-              <a:t>32 / 41</a:t>
-            </a:r>
-          </a:p>
-        </p:txBody>
-      </p:sp>
     </p:spTree>
   </p:cSld>
   <p:clrMapOvr>
@@ -40139,45 +39125,6 @@
           </a:p>
         </p:txBody>
       </p:sp>
-      <p:sp>
-        <p:nvSpPr>
-          <p:cNvPr id="31" name="TextBox 30"/>
-          <p:cNvSpPr txBox="1"/>
-          <p:nvPr/>
-        </p:nvSpPr>
-        <p:spPr>
-          <a:xfrm>
-            <a:off x="11274552" y="6547104"/>
-            <a:ext cx="868680" cy="256032"/>
-          </a:xfrm>
-          <a:prstGeom prst="rect">
-            <a:avLst/>
-          </a:prstGeom>
-          <a:noFill/>
-        </p:spPr>
-        <p:txBody>
-          <a:bodyPr wrap="none" lIns="0" rIns="0" tIns="0" bIns="0">
-            <a:spAutoFit/>
-          </a:bodyPr>
-          <a:lstStyle/>
-          <a:p>
-            <a:pPr algn="r">
-              <a:lnSpc>
-                <a:spcPct val="100000"/>
-              </a:lnSpc>
-            </a:pPr>
-            <a:r>
-              <a:rPr sz="1000" i="1">
-                <a:solidFill>
-                  <a:srgbClr val="5B6678"/>
-                </a:solidFill>
-                <a:latin typeface="DejaVu Sans"/>
-              </a:rPr>
-              <a:t>33 / 41</a:t>
-            </a:r>
-          </a:p>
-        </p:txBody>
-      </p:sp>
     </p:spTree>
   </p:cSld>
   <p:clrMapOvr>
@@ -40917,45 +39864,6 @@
           </a:p>
         </p:txBody>
       </p:sp>
-      <p:sp>
-        <p:nvSpPr>
-          <p:cNvPr id="17" name="TextBox 16"/>
-          <p:cNvSpPr txBox="1"/>
-          <p:nvPr/>
-        </p:nvSpPr>
-        <p:spPr>
-          <a:xfrm>
-            <a:off x="11274552" y="6547104"/>
-            <a:ext cx="868680" cy="256032"/>
-          </a:xfrm>
-          <a:prstGeom prst="rect">
-            <a:avLst/>
-          </a:prstGeom>
-          <a:noFill/>
-        </p:spPr>
-        <p:txBody>
-          <a:bodyPr wrap="none" lIns="0" rIns="0" tIns="0" bIns="0">
-            <a:spAutoFit/>
-          </a:bodyPr>
-          <a:lstStyle/>
-          <a:p>
-            <a:pPr algn="r">
-              <a:lnSpc>
-                <a:spcPct val="100000"/>
-              </a:lnSpc>
-            </a:pPr>
-            <a:r>
-              <a:rPr sz="1000" i="1">
-                <a:solidFill>
-                  <a:srgbClr val="5B6678"/>
-                </a:solidFill>
-                <a:latin typeface="DejaVu Sans"/>
-              </a:rPr>
-              <a:t>34 / 41</a:t>
-            </a:r>
-          </a:p>
-        </p:txBody>
-      </p:sp>
     </p:spTree>
   </p:cSld>
   <p:clrMapOvr>
@@ -41853,45 +40761,6 @@
           </a:p>
         </p:txBody>
       </p:sp>
-      <p:sp>
-        <p:nvSpPr>
-          <p:cNvPr id="22" name="TextBox 21"/>
-          <p:cNvSpPr txBox="1"/>
-          <p:nvPr/>
-        </p:nvSpPr>
-        <p:spPr>
-          <a:xfrm>
-            <a:off x="11274552" y="6547104"/>
-            <a:ext cx="868680" cy="256032"/>
-          </a:xfrm>
-          <a:prstGeom prst="rect">
-            <a:avLst/>
-          </a:prstGeom>
-          <a:noFill/>
-        </p:spPr>
-        <p:txBody>
-          <a:bodyPr wrap="none" lIns="0" rIns="0" tIns="0" bIns="0">
-            <a:spAutoFit/>
-          </a:bodyPr>
-          <a:lstStyle/>
-          <a:p>
-            <a:pPr algn="r">
-              <a:lnSpc>
-                <a:spcPct val="100000"/>
-              </a:lnSpc>
-            </a:pPr>
-            <a:r>
-              <a:rPr sz="1000" i="1">
-                <a:solidFill>
-                  <a:srgbClr val="5B6678"/>
-                </a:solidFill>
-                <a:latin typeface="DejaVu Sans"/>
-              </a:rPr>
-              <a:t>35 / 41</a:t>
-            </a:r>
-          </a:p>
-        </p:txBody>
-      </p:sp>
     </p:spTree>
   </p:cSld>
   <p:clrMapOvr>
@@ -43126,45 +41995,6 @@
           </a:p>
         </p:txBody>
       </p:sp>
-      <p:sp>
-        <p:nvSpPr>
-          <p:cNvPr id="31" name="TextBox 30"/>
-          <p:cNvSpPr txBox="1"/>
-          <p:nvPr/>
-        </p:nvSpPr>
-        <p:spPr>
-          <a:xfrm>
-            <a:off x="11274552" y="6547104"/>
-            <a:ext cx="868680" cy="256032"/>
-          </a:xfrm>
-          <a:prstGeom prst="rect">
-            <a:avLst/>
-          </a:prstGeom>
-          <a:noFill/>
-        </p:spPr>
-        <p:txBody>
-          <a:bodyPr wrap="none" lIns="0" rIns="0" tIns="0" bIns="0">
-            <a:spAutoFit/>
-          </a:bodyPr>
-          <a:lstStyle/>
-          <a:p>
-            <a:pPr algn="r">
-              <a:lnSpc>
-                <a:spcPct val="100000"/>
-              </a:lnSpc>
-            </a:pPr>
-            <a:r>
-              <a:rPr sz="1000" i="1">
-                <a:solidFill>
-                  <a:srgbClr val="5B6678"/>
-                </a:solidFill>
-                <a:latin typeface="DejaVu Sans"/>
-              </a:rPr>
-              <a:t>36 / 41</a:t>
-            </a:r>
-          </a:p>
-        </p:txBody>
-      </p:sp>
     </p:spTree>
   </p:cSld>
   <p:clrMapOvr>
@@ -47524,45 +46354,6 @@
           </a:p>
         </p:txBody>
       </p:sp>
-      <p:sp>
-        <p:nvSpPr>
-          <p:cNvPr id="104" name="TextBox 103"/>
-          <p:cNvSpPr txBox="1"/>
-          <p:nvPr/>
-        </p:nvSpPr>
-        <p:spPr>
-          <a:xfrm>
-            <a:off x="11274552" y="6547104"/>
-            <a:ext cx="868680" cy="256032"/>
-          </a:xfrm>
-          <a:prstGeom prst="rect">
-            <a:avLst/>
-          </a:prstGeom>
-          <a:noFill/>
-        </p:spPr>
-        <p:txBody>
-          <a:bodyPr wrap="none" lIns="0" rIns="0" tIns="0" bIns="0">
-            <a:spAutoFit/>
-          </a:bodyPr>
-          <a:lstStyle/>
-          <a:p>
-            <a:pPr algn="r">
-              <a:lnSpc>
-                <a:spcPct val="100000"/>
-              </a:lnSpc>
-            </a:pPr>
-            <a:r>
-              <a:rPr sz="1000" i="1">
-                <a:solidFill>
-                  <a:srgbClr val="5B6678"/>
-                </a:solidFill>
-                <a:latin typeface="DejaVu Sans"/>
-              </a:rPr>
-              <a:t>37 / 41</a:t>
-            </a:r>
-          </a:p>
-        </p:txBody>
-      </p:sp>
     </p:spTree>
   </p:cSld>
   <p:clrMapOvr>
@@ -48522,45 +47313,6 @@
           </a:p>
         </p:txBody>
       </p:sp>
-      <p:sp>
-        <p:nvSpPr>
-          <p:cNvPr id="23" name="TextBox 22"/>
-          <p:cNvSpPr txBox="1"/>
-          <p:nvPr/>
-        </p:nvSpPr>
-        <p:spPr>
-          <a:xfrm>
-            <a:off x="11274552" y="6547104"/>
-            <a:ext cx="868680" cy="256032"/>
-          </a:xfrm>
-          <a:prstGeom prst="rect">
-            <a:avLst/>
-          </a:prstGeom>
-          <a:noFill/>
-        </p:spPr>
-        <p:txBody>
-          <a:bodyPr wrap="none" lIns="0" rIns="0" tIns="0" bIns="0">
-            <a:spAutoFit/>
-          </a:bodyPr>
-          <a:lstStyle/>
-          <a:p>
-            <a:pPr algn="r">
-              <a:lnSpc>
-                <a:spcPct val="100000"/>
-              </a:lnSpc>
-            </a:pPr>
-            <a:r>
-              <a:rPr sz="1000" i="1">
-                <a:solidFill>
-                  <a:srgbClr val="5B6678"/>
-                </a:solidFill>
-                <a:latin typeface="DejaVu Sans"/>
-              </a:rPr>
-              <a:t>38 / 41</a:t>
-            </a:r>
-          </a:p>
-        </p:txBody>
-      </p:sp>
     </p:spTree>
   </p:cSld>
   <p:clrMapOvr>
@@ -49879,45 +48631,6 @@
           </a:p>
         </p:txBody>
       </p:sp>
-      <p:sp>
-        <p:nvSpPr>
-          <p:cNvPr id="32" name="TextBox 31"/>
-          <p:cNvSpPr txBox="1"/>
-          <p:nvPr/>
-        </p:nvSpPr>
-        <p:spPr>
-          <a:xfrm>
-            <a:off x="11274552" y="6547104"/>
-            <a:ext cx="868680" cy="256032"/>
-          </a:xfrm>
-          <a:prstGeom prst="rect">
-            <a:avLst/>
-          </a:prstGeom>
-          <a:noFill/>
-        </p:spPr>
-        <p:txBody>
-          <a:bodyPr wrap="none" lIns="0" rIns="0" tIns="0" bIns="0">
-            <a:spAutoFit/>
-          </a:bodyPr>
-          <a:lstStyle/>
-          <a:p>
-            <a:pPr algn="r">
-              <a:lnSpc>
-                <a:spcPct val="100000"/>
-              </a:lnSpc>
-            </a:pPr>
-            <a:r>
-              <a:rPr sz="1000" i="1">
-                <a:solidFill>
-                  <a:srgbClr val="5B6678"/>
-                </a:solidFill>
-                <a:latin typeface="DejaVu Sans"/>
-              </a:rPr>
-              <a:t>39 / 41</a:t>
-            </a:r>
-          </a:p>
-        </p:txBody>
-      </p:sp>
     </p:spTree>
   </p:cSld>
   <p:clrMapOvr>
@@ -50551,45 +49264,6 @@
           </a:p>
         </p:txBody>
       </p:sp>
-      <p:sp>
-        <p:nvSpPr>
-          <p:cNvPr id="15" name="TextBox 14"/>
-          <p:cNvSpPr txBox="1"/>
-          <p:nvPr/>
-        </p:nvSpPr>
-        <p:spPr>
-          <a:xfrm>
-            <a:off x="11274552" y="6547104"/>
-            <a:ext cx="868680" cy="256032"/>
-          </a:xfrm>
-          <a:prstGeom prst="rect">
-            <a:avLst/>
-          </a:prstGeom>
-          <a:noFill/>
-        </p:spPr>
-        <p:txBody>
-          <a:bodyPr wrap="none" lIns="0" rIns="0" tIns="0" bIns="0">
-            <a:spAutoFit/>
-          </a:bodyPr>
-          <a:lstStyle/>
-          <a:p>
-            <a:pPr algn="r">
-              <a:lnSpc>
-                <a:spcPct val="100000"/>
-              </a:lnSpc>
-            </a:pPr>
-            <a:r>
-              <a:rPr sz="1000" i="1">
-                <a:solidFill>
-                  <a:srgbClr val="5B6678"/>
-                </a:solidFill>
-                <a:latin typeface="DejaVu Sans"/>
-              </a:rPr>
-              <a:t>4 / 41</a:t>
-            </a:r>
-          </a:p>
-        </p:txBody>
-      </p:sp>
     </p:spTree>
   </p:cSld>
   <p:clrMapOvr>
@@ -51520,45 +50194,6 @@
                 <a:hlinkClick r:id="rId5"/>
               </a:rPr>
               <a:t>Anthropic — skill formation (Shen &amp; Tamkin 2026)</a:t>
-            </a:r>
-          </a:p>
-        </p:txBody>
-      </p:sp>
-      <p:sp>
-        <p:nvSpPr>
-          <p:cNvPr id="27" name="TextBox 26"/>
-          <p:cNvSpPr txBox="1"/>
-          <p:nvPr/>
-        </p:nvSpPr>
-        <p:spPr>
-          <a:xfrm>
-            <a:off x="11274552" y="6547104"/>
-            <a:ext cx="868680" cy="256032"/>
-          </a:xfrm>
-          <a:prstGeom prst="rect">
-            <a:avLst/>
-          </a:prstGeom>
-          <a:noFill/>
-        </p:spPr>
-        <p:txBody>
-          <a:bodyPr wrap="none" lIns="0" rIns="0" tIns="0" bIns="0">
-            <a:spAutoFit/>
-          </a:bodyPr>
-          <a:lstStyle/>
-          <a:p>
-            <a:pPr algn="r">
-              <a:lnSpc>
-                <a:spcPct val="100000"/>
-              </a:lnSpc>
-            </a:pPr>
-            <a:r>
-              <a:rPr sz="1000" i="1">
-                <a:solidFill>
-                  <a:srgbClr val="5B6678"/>
-                </a:solidFill>
-                <a:latin typeface="DejaVu Sans"/>
-              </a:rPr>
-              <a:t>40 / 41</a:t>
             </a:r>
           </a:p>
         </p:txBody>
@@ -52440,45 +51075,6 @@
           </a:p>
         </p:txBody>
       </p:sp>
-      <p:sp>
-        <p:nvSpPr>
-          <p:cNvPr id="23" name="TextBox 22"/>
-          <p:cNvSpPr txBox="1"/>
-          <p:nvPr/>
-        </p:nvSpPr>
-        <p:spPr>
-          <a:xfrm>
-            <a:off x="11274552" y="6547104"/>
-            <a:ext cx="868680" cy="256032"/>
-          </a:xfrm>
-          <a:prstGeom prst="rect">
-            <a:avLst/>
-          </a:prstGeom>
-          <a:noFill/>
-        </p:spPr>
-        <p:txBody>
-          <a:bodyPr wrap="none" lIns="0" rIns="0" tIns="0" bIns="0">
-            <a:spAutoFit/>
-          </a:bodyPr>
-          <a:lstStyle/>
-          <a:p>
-            <a:pPr algn="r">
-              <a:lnSpc>
-                <a:spcPct val="100000"/>
-              </a:lnSpc>
-            </a:pPr>
-            <a:r>
-              <a:rPr sz="1000" i="1">
-                <a:solidFill>
-                  <a:srgbClr val="5B6678"/>
-                </a:solidFill>
-                <a:latin typeface="DejaVu Sans"/>
-              </a:rPr>
-              <a:t>41 / 41</a:t>
-            </a:r>
-          </a:p>
-        </p:txBody>
-      </p:sp>
     </p:spTree>
   </p:cSld>
   <p:clrMapOvr>
@@ -53909,45 +52505,6 @@
           </a:p>
         </p:txBody>
       </p:sp>
-      <p:sp>
-        <p:nvSpPr>
-          <p:cNvPr id="35" name="TextBox 34"/>
-          <p:cNvSpPr txBox="1"/>
-          <p:nvPr/>
-        </p:nvSpPr>
-        <p:spPr>
-          <a:xfrm>
-            <a:off x="11274552" y="6547104"/>
-            <a:ext cx="868680" cy="256032"/>
-          </a:xfrm>
-          <a:prstGeom prst="rect">
-            <a:avLst/>
-          </a:prstGeom>
-          <a:noFill/>
-        </p:spPr>
-        <p:txBody>
-          <a:bodyPr wrap="none" lIns="0" rIns="0" tIns="0" bIns="0">
-            <a:spAutoFit/>
-          </a:bodyPr>
-          <a:lstStyle/>
-          <a:p>
-            <a:pPr algn="r">
-              <a:lnSpc>
-                <a:spcPct val="100000"/>
-              </a:lnSpc>
-            </a:pPr>
-            <a:r>
-              <a:rPr sz="1000" i="1">
-                <a:solidFill>
-                  <a:srgbClr val="5B6678"/>
-                </a:solidFill>
-                <a:latin typeface="DejaVu Sans"/>
-              </a:rPr>
-              <a:t>5 / 41</a:t>
-            </a:r>
-          </a:p>
-        </p:txBody>
-      </p:sp>
     </p:spTree>
   </p:cSld>
   <p:clrMapOvr>
@@ -56111,45 +54668,6 @@
           </a:p>
         </p:txBody>
       </p:sp>
-      <p:sp>
-        <p:nvSpPr>
-          <p:cNvPr id="47" name="TextBox 46"/>
-          <p:cNvSpPr txBox="1"/>
-          <p:nvPr/>
-        </p:nvSpPr>
-        <p:spPr>
-          <a:xfrm>
-            <a:off x="11274552" y="6547104"/>
-            <a:ext cx="868680" cy="256032"/>
-          </a:xfrm>
-          <a:prstGeom prst="rect">
-            <a:avLst/>
-          </a:prstGeom>
-          <a:noFill/>
-        </p:spPr>
-        <p:txBody>
-          <a:bodyPr wrap="none" lIns="0" rIns="0" tIns="0" bIns="0">
-            <a:spAutoFit/>
-          </a:bodyPr>
-          <a:lstStyle/>
-          <a:p>
-            <a:pPr algn="r">
-              <a:lnSpc>
-                <a:spcPct val="100000"/>
-              </a:lnSpc>
-            </a:pPr>
-            <a:r>
-              <a:rPr sz="1000" i="1">
-                <a:solidFill>
-                  <a:srgbClr val="5B6678"/>
-                </a:solidFill>
-                <a:latin typeface="DejaVu Sans"/>
-              </a:rPr>
-              <a:t>6 / 41</a:t>
-            </a:r>
-          </a:p>
-        </p:txBody>
-      </p:sp>
     </p:spTree>
   </p:cSld>
   <p:clrMapOvr>
@@ -57406,45 +55924,6 @@
           </a:p>
         </p:txBody>
       </p:sp>
-      <p:sp>
-        <p:nvSpPr>
-          <p:cNvPr id="30" name="TextBox 29"/>
-          <p:cNvSpPr txBox="1"/>
-          <p:nvPr/>
-        </p:nvSpPr>
-        <p:spPr>
-          <a:xfrm>
-            <a:off x="11274552" y="6547104"/>
-            <a:ext cx="868680" cy="256032"/>
-          </a:xfrm>
-          <a:prstGeom prst="rect">
-            <a:avLst/>
-          </a:prstGeom>
-          <a:noFill/>
-        </p:spPr>
-        <p:txBody>
-          <a:bodyPr wrap="none" lIns="0" rIns="0" tIns="0" bIns="0">
-            <a:spAutoFit/>
-          </a:bodyPr>
-          <a:lstStyle/>
-          <a:p>
-            <a:pPr algn="r">
-              <a:lnSpc>
-                <a:spcPct val="100000"/>
-              </a:lnSpc>
-            </a:pPr>
-            <a:r>
-              <a:rPr sz="1000" i="1">
-                <a:solidFill>
-                  <a:srgbClr val="5B6678"/>
-                </a:solidFill>
-                <a:latin typeface="DejaVu Sans"/>
-              </a:rPr>
-              <a:t>7 / 41</a:t>
-            </a:r>
-          </a:p>
-        </p:txBody>
-      </p:sp>
     </p:spTree>
   </p:cSld>
   <p:clrMapOvr>
@@ -58381,45 +56860,6 @@
           </a:p>
         </p:txBody>
       </p:sp>
-      <p:sp>
-        <p:nvSpPr>
-          <p:cNvPr id="22" name="TextBox 21"/>
-          <p:cNvSpPr txBox="1"/>
-          <p:nvPr/>
-        </p:nvSpPr>
-        <p:spPr>
-          <a:xfrm>
-            <a:off x="11274552" y="6547104"/>
-            <a:ext cx="868680" cy="256032"/>
-          </a:xfrm>
-          <a:prstGeom prst="rect">
-            <a:avLst/>
-          </a:prstGeom>
-          <a:noFill/>
-        </p:spPr>
-        <p:txBody>
-          <a:bodyPr wrap="none" lIns="0" rIns="0" tIns="0" bIns="0">
-            <a:spAutoFit/>
-          </a:bodyPr>
-          <a:lstStyle/>
-          <a:p>
-            <a:pPr algn="r">
-              <a:lnSpc>
-                <a:spcPct val="100000"/>
-              </a:lnSpc>
-            </a:pPr>
-            <a:r>
-              <a:rPr sz="1000" i="1">
-                <a:solidFill>
-                  <a:srgbClr val="5B6678"/>
-                </a:solidFill>
-                <a:latin typeface="DejaVu Sans"/>
-              </a:rPr>
-              <a:t>8 / 41</a:t>
-            </a:r>
-          </a:p>
-        </p:txBody>
-      </p:sp>
     </p:spTree>
   </p:cSld>
   <p:clrMapOvr>
@@ -59650,45 +58090,6 @@
                 <a:latin typeface="DejaVu Sans"/>
               </a:rPr>
               <a:t>Synthesis</a:t>
-            </a:r>
-          </a:p>
-        </p:txBody>
-      </p:sp>
-      <p:sp>
-        <p:nvSpPr>
-          <p:cNvPr id="31" name="TextBox 30"/>
-          <p:cNvSpPr txBox="1"/>
-          <p:nvPr/>
-        </p:nvSpPr>
-        <p:spPr>
-          <a:xfrm>
-            <a:off x="11274552" y="6547104"/>
-            <a:ext cx="868680" cy="256032"/>
-          </a:xfrm>
-          <a:prstGeom prst="rect">
-            <a:avLst/>
-          </a:prstGeom>
-          <a:noFill/>
-        </p:spPr>
-        <p:txBody>
-          <a:bodyPr wrap="none" lIns="0" rIns="0" tIns="0" bIns="0">
-            <a:spAutoFit/>
-          </a:bodyPr>
-          <a:lstStyle/>
-          <a:p>
-            <a:pPr algn="r">
-              <a:lnSpc>
-                <a:spcPct val="100000"/>
-              </a:lnSpc>
-            </a:pPr>
-            <a:r>
-              <a:rPr sz="1000" i="1">
-                <a:solidFill>
-                  <a:srgbClr val="5B6678"/>
-                </a:solidFill>
-                <a:latin typeface="DejaVu Sans"/>
-              </a:rPr>
-              <a:t>9 / 41</a:t>
             </a:r>
           </a:p>
         </p:txBody>
